--- a/evidence-room/04_AP_AGENT_OS_TEAM/Decks/ER_Steering_Committee.pptx
+++ b/evidence-room/04_AP_AGENT_OS_TEAM/Decks/ER_Steering_Committee.pptx
@@ -7,6 +7,12 @@
   <p:sldIdLst>
     <p:sldId id="256" r:id="rId7"/>
     <p:sldId id="257" r:id="rId8"/>
+    <p:sldId id="258" r:id="rId9"/>
+    <p:sldId id="259" r:id="rId10"/>
+    <p:sldId id="260" r:id="rId11"/>
+    <p:sldId id="261" r:id="rId12"/>
+    <p:sldId id="262" r:id="rId13"/>
+    <p:sldId id="263" r:id="rId14"/>
   </p:sldIdLst>
   <p:sldSz cx="9144000" cy="6858000" type="screen4x3"/>
   <p:notesSz cx="6858000" cy="9144000"/>
@@ -3091,47 +3097,269 @@
       <p:grpSpPr/>
       <p:sp>
         <p:nvSpPr>
-          <p:cNvPr id="2" name="Title 1"/>
-          <p:cNvSpPr>
-            <a:spLocks noGrp="1"/>
-          </p:cNvSpPr>
-          <p:nvPr>
-            <p:ph type="ctrTitle"/>
-          </p:nvPr>
-        </p:nvSpPr>
-        <p:spPr/>
-        <p:txBody>
-          <a:bodyPr/>
-          <a:lstStyle/>
-          <a:p>
-            <a:r>
-              <a:t>Agent layer — decision pack</a:t>
-            </a:r>
-          </a:p>
-        </p:txBody>
-      </p:sp>
-      <p:sp>
-        <p:nvSpPr>
-          <p:cNvPr id="3" name="Subtitle 2"/>
-          <p:cNvSpPr>
-            <a:spLocks noGrp="1"/>
-          </p:cNvSpPr>
-          <p:nvPr>
-            <p:ph type="subTitle" idx="1"/>
-          </p:nvPr>
-        </p:nvSpPr>
-        <p:spPr/>
-        <p:txBody>
-          <a:bodyPr/>
-          <a:lstStyle/>
-          <a:p>
-            <a:r>
-              <a:t>STEERING</a:t>
-            </a:r>
-          </a:p>
-          <a:p>
-            <a:r>
-              <a:t>Promote / hold / demote. Not a celebration slide.</a:t>
+          <p:cNvPr id="2" name="Rectangle 1"/>
+          <p:cNvSpPr/>
+          <p:nvPr/>
+        </p:nvSpPr>
+        <p:spPr>
+          <a:xfrm>
+            <a:off x="0" y="0"/>
+            <a:ext cx="9144000" cy="6858000"/>
+          </a:xfrm>
+          <a:prstGeom prst="rect">
+            <a:avLst/>
+          </a:prstGeom>
+          <a:solidFill>
+            <a:srgbClr val="F3EEE4"/>
+          </a:solidFill>
+          <a:ln>
+            <a:noFill/>
+          </a:ln>
+        </p:spPr>
+        <p:style>
+          <a:lnRef idx="1">
+            <a:schemeClr val="accent1"/>
+          </a:lnRef>
+          <a:fillRef idx="3">
+            <a:schemeClr val="accent1"/>
+          </a:fillRef>
+          <a:effectRef idx="2">
+            <a:schemeClr val="accent1"/>
+          </a:effectRef>
+          <a:fontRef idx="minor">
+            <a:schemeClr val="lt1"/>
+          </a:fontRef>
+        </p:style>
+        <p:txBody>
+          <a:bodyPr rtlCol="0" anchor="ctr"/>
+          <a:lstStyle/>
+          <a:p>
+            <a:pPr algn="ctr"/>
+          </a:p>
+        </p:txBody>
+      </p:sp>
+      <p:sp>
+        <p:nvSpPr>
+          <p:cNvPr id="3" name="Rectangle 2"/>
+          <p:cNvSpPr/>
+          <p:nvPr/>
+        </p:nvSpPr>
+        <p:spPr>
+          <a:xfrm>
+            <a:off x="457200" y="640080"/>
+            <a:ext cx="347472" cy="347472"/>
+          </a:xfrm>
+          <a:prstGeom prst="rect">
+            <a:avLst/>
+          </a:prstGeom>
+          <a:solidFill>
+            <a:srgbClr val="F3EEE4"/>
+          </a:solidFill>
+          <a:ln>
+            <a:noFill/>
+          </a:ln>
+        </p:spPr>
+        <p:style>
+          <a:lnRef idx="1">
+            <a:schemeClr val="accent1"/>
+          </a:lnRef>
+          <a:fillRef idx="3">
+            <a:schemeClr val="accent1"/>
+          </a:fillRef>
+          <a:effectRef idx="2">
+            <a:schemeClr val="accent1"/>
+          </a:effectRef>
+          <a:fontRef idx="minor">
+            <a:schemeClr val="lt1"/>
+          </a:fontRef>
+        </p:style>
+        <p:txBody>
+          <a:bodyPr rtlCol="0" anchor="ctr"/>
+          <a:lstStyle/>
+          <a:p>
+            <a:pPr algn="ctr"/>
+          </a:p>
+        </p:txBody>
+      </p:sp>
+      <p:sp>
+        <p:nvSpPr>
+          <p:cNvPr id="4" name="Rectangle 3"/>
+          <p:cNvSpPr/>
+          <p:nvPr/>
+        </p:nvSpPr>
+        <p:spPr>
+          <a:xfrm>
+            <a:off x="457200" y="640080"/>
+            <a:ext cx="347472" cy="347472"/>
+          </a:xfrm>
+          <a:prstGeom prst="rect">
+            <a:avLst/>
+          </a:prstGeom>
+          <a:noFill/>
+          <a:ln w="12700">
+            <a:solidFill>
+              <a:srgbClr val="B0893E"/>
+            </a:solidFill>
+          </a:ln>
+        </p:spPr>
+        <p:style>
+          <a:lnRef idx="1">
+            <a:schemeClr val="accent1"/>
+          </a:lnRef>
+          <a:fillRef idx="3">
+            <a:schemeClr val="accent1"/>
+          </a:fillRef>
+          <a:effectRef idx="2">
+            <a:schemeClr val="accent1"/>
+          </a:effectRef>
+          <a:fontRef idx="minor">
+            <a:schemeClr val="lt1"/>
+          </a:fontRef>
+        </p:style>
+        <p:txBody>
+          <a:bodyPr rtlCol="0" anchor="ctr"/>
+          <a:lstStyle/>
+          <a:p>
+            <a:pPr algn="ctr"/>
+          </a:p>
+        </p:txBody>
+      </p:sp>
+      <p:sp>
+        <p:nvSpPr>
+          <p:cNvPr id="5" name="TextBox 4"/>
+          <p:cNvSpPr txBox="1"/>
+          <p:nvPr/>
+        </p:nvSpPr>
+        <p:spPr>
+          <a:xfrm>
+            <a:off x="457200" y="1280160"/>
+            <a:ext cx="8229600" cy="320040"/>
+          </a:xfrm>
+          <a:prstGeom prst="rect">
+            <a:avLst/>
+          </a:prstGeom>
+          <a:noFill/>
+        </p:spPr>
+        <p:txBody>
+          <a:bodyPr wrap="square">
+            <a:spAutoFit/>
+          </a:bodyPr>
+          <a:lstStyle/>
+          <a:p>
+            <a:pPr algn="l"/>
+            <a:r>
+              <a:rPr sz="1200" b="1">
+                <a:solidFill>
+                  <a:srgbClr val="B0893E"/>
+                </a:solidFill>
+                <a:latin typeface="Calibri"/>
+              </a:rPr>
+              <a:t>STEERING COMMITTEE</a:t>
+            </a:r>
+          </a:p>
+        </p:txBody>
+      </p:sp>
+      <p:sp>
+        <p:nvSpPr>
+          <p:cNvPr id="6" name="TextBox 5"/>
+          <p:cNvSpPr txBox="1"/>
+          <p:nvPr/>
+        </p:nvSpPr>
+        <p:spPr>
+          <a:xfrm>
+            <a:off x="457200" y="1737360"/>
+            <a:ext cx="8229600" cy="2011680"/>
+          </a:xfrm>
+          <a:prstGeom prst="rect">
+            <a:avLst/>
+          </a:prstGeom>
+          <a:noFill/>
+        </p:spPr>
+        <p:txBody>
+          <a:bodyPr wrap="square">
+            <a:spAutoFit/>
+          </a:bodyPr>
+          <a:lstStyle/>
+          <a:p>
+            <a:pPr algn="l"/>
+            <a:r>
+              <a:rPr sz="3600" b="0">
+                <a:solidFill>
+                  <a:srgbClr val="12160F"/>
+                </a:solidFill>
+                <a:latin typeface="Georgia"/>
+              </a:rPr>
+              <a:t>Promote / hold / demote</a:t>
+            </a:r>
+          </a:p>
+        </p:txBody>
+      </p:sp>
+      <p:sp>
+        <p:nvSpPr>
+          <p:cNvPr id="7" name="TextBox 6"/>
+          <p:cNvSpPr txBox="1"/>
+          <p:nvPr/>
+        </p:nvSpPr>
+        <p:spPr>
+          <a:xfrm>
+            <a:off x="457200" y="4023360"/>
+            <a:ext cx="7772400" cy="1097280"/>
+          </a:xfrm>
+          <a:prstGeom prst="rect">
+            <a:avLst/>
+          </a:prstGeom>
+          <a:noFill/>
+        </p:spPr>
+        <p:txBody>
+          <a:bodyPr wrap="square">
+            <a:spAutoFit/>
+          </a:bodyPr>
+          <a:lstStyle/>
+          <a:p>
+            <a:pPr algn="l"/>
+            <a:r>
+              <a:rPr sz="1600" b="0">
+                <a:solidFill>
+                  <a:srgbClr val="5A6154"/>
+                </a:solidFill>
+                <a:latin typeface="Calibri"/>
+              </a:rPr>
+              <a:t>A decision pack, not a celebration slide. Missing artefacts are a decline.</a:t>
+            </a:r>
+          </a:p>
+        </p:txBody>
+      </p:sp>
+      <p:sp>
+        <p:nvSpPr>
+          <p:cNvPr id="8" name="TextBox 7"/>
+          <p:cNvSpPr txBox="1"/>
+          <p:nvPr/>
+        </p:nvSpPr>
+        <p:spPr>
+          <a:xfrm>
+            <a:off x="457200" y="6217920"/>
+            <a:ext cx="8229600" cy="274320"/>
+          </a:xfrm>
+          <a:prstGeom prst="rect">
+            <a:avLst/>
+          </a:prstGeom>
+          <a:noFill/>
+        </p:spPr>
+        <p:txBody>
+          <a:bodyPr wrap="square">
+            <a:spAutoFit/>
+          </a:bodyPr>
+          <a:lstStyle/>
+          <a:p>
+            <a:pPr algn="l"/>
+            <a:r>
+              <a:rPr sz="1100" b="0">
+                <a:solidFill>
+                  <a:srgbClr val="5A6154"/>
+                </a:solidFill>
+                <a:latin typeface="Calibri"/>
+              </a:rPr>
+              <a:t>Proof before permission.  ·  Working draft. Not a forecast.</a:t>
             </a:r>
           </a:p>
         </p:txBody>
@@ -3156,73 +3384,2196 @@
       <p:grpSpPr/>
       <p:sp>
         <p:nvSpPr>
-          <p:cNvPr id="2" name="Title 1"/>
-          <p:cNvSpPr>
-            <a:spLocks noGrp="1"/>
-          </p:cNvSpPr>
-          <p:nvPr>
-            <p:ph type="title"/>
-          </p:nvPr>
-        </p:nvSpPr>
-        <p:spPr/>
-        <p:txBody>
-          <a:bodyPr/>
-          <a:lstStyle/>
-          <a:p>
-            <a:r>
-              <a:t>Required pack</a:t>
-            </a:r>
-          </a:p>
-        </p:txBody>
-      </p:sp>
-      <p:sp>
-        <p:nvSpPr>
-          <p:cNvPr id="3" name="Content Placeholder 2"/>
-          <p:cNvSpPr>
-            <a:spLocks noGrp="1"/>
-          </p:cNvSpPr>
-          <p:nvPr>
-            <p:ph idx="1"/>
-          </p:nvPr>
-        </p:nvSpPr>
-        <p:spPr/>
-        <p:txBody>
-          <a:bodyPr/>
-          <a:lstStyle/>
-          <a:p>
-            <a:pPr/>
-            <a:r>
-              <a:t>Scorecard with locked formulas.</a:t>
-            </a:r>
-          </a:p>
-          <a:p>
-            <a:pPr/>
-            <a:r>
-              <a:t>Exception ageing by code.</a:t>
-            </a:r>
-          </a:p>
-          <a:p>
-            <a:pPr/>
-            <a:r>
-              <a:t>Autonomy register.</a:t>
-            </a:r>
-          </a:p>
-          <a:p>
-            <a:pPr/>
-            <a:r>
-              <a:t>Incidents and overrides.</a:t>
-            </a:r>
-          </a:p>
-          <a:p>
-            <a:pPr/>
-            <a:r>
-              <a:t>Cost of inference vs correct outcomes.</a:t>
-            </a:r>
-          </a:p>
-          <a:p>
-            <a:pPr/>
-            <a:r>
-              <a:t>A written recommend / hold / demote.</a:t>
+          <p:cNvPr id="2" name="Rectangle 1"/>
+          <p:cNvSpPr/>
+          <p:nvPr/>
+        </p:nvSpPr>
+        <p:spPr>
+          <a:xfrm>
+            <a:off x="0" y="0"/>
+            <a:ext cx="9144000" cy="6858000"/>
+          </a:xfrm>
+          <a:prstGeom prst="rect">
+            <a:avLst/>
+          </a:prstGeom>
+          <a:solidFill>
+            <a:srgbClr val="F3EEE4"/>
+          </a:solidFill>
+          <a:ln>
+            <a:noFill/>
+          </a:ln>
+        </p:spPr>
+        <p:style>
+          <a:lnRef idx="1">
+            <a:schemeClr val="accent1"/>
+          </a:lnRef>
+          <a:fillRef idx="3">
+            <a:schemeClr val="accent1"/>
+          </a:fillRef>
+          <a:effectRef idx="2">
+            <a:schemeClr val="accent1"/>
+          </a:effectRef>
+          <a:fontRef idx="minor">
+            <a:schemeClr val="lt1"/>
+          </a:fontRef>
+        </p:style>
+        <p:txBody>
+          <a:bodyPr rtlCol="0" anchor="ctr"/>
+          <a:lstStyle/>
+          <a:p>
+            <a:pPr algn="ctr"/>
+          </a:p>
+        </p:txBody>
+      </p:sp>
+      <p:sp>
+        <p:nvSpPr>
+          <p:cNvPr id="3" name="Rectangle 2"/>
+          <p:cNvSpPr/>
+          <p:nvPr/>
+        </p:nvSpPr>
+        <p:spPr>
+          <a:xfrm>
+            <a:off x="0" y="0"/>
+            <a:ext cx="73152" cy="6858000"/>
+          </a:xfrm>
+          <a:prstGeom prst="rect">
+            <a:avLst/>
+          </a:prstGeom>
+          <a:solidFill>
+            <a:srgbClr val="B0893E"/>
+          </a:solidFill>
+          <a:ln>
+            <a:noFill/>
+          </a:ln>
+        </p:spPr>
+        <p:style>
+          <a:lnRef idx="1">
+            <a:schemeClr val="accent1"/>
+          </a:lnRef>
+          <a:fillRef idx="3">
+            <a:schemeClr val="accent1"/>
+          </a:fillRef>
+          <a:effectRef idx="2">
+            <a:schemeClr val="accent1"/>
+          </a:effectRef>
+          <a:fontRef idx="minor">
+            <a:schemeClr val="lt1"/>
+          </a:fontRef>
+        </p:style>
+        <p:txBody>
+          <a:bodyPr rtlCol="0" anchor="ctr"/>
+          <a:lstStyle/>
+          <a:p>
+            <a:pPr algn="ctr"/>
+          </a:p>
+        </p:txBody>
+      </p:sp>
+      <p:sp>
+        <p:nvSpPr>
+          <p:cNvPr id="4" name="TextBox 3"/>
+          <p:cNvSpPr txBox="1"/>
+          <p:nvPr/>
+        </p:nvSpPr>
+        <p:spPr>
+          <a:xfrm>
+            <a:off x="365760" y="164592"/>
+            <a:ext cx="8412480" cy="256032"/>
+          </a:xfrm>
+          <a:prstGeom prst="rect">
+            <a:avLst/>
+          </a:prstGeom>
+          <a:noFill/>
+        </p:spPr>
+        <p:txBody>
+          <a:bodyPr wrap="square">
+            <a:spAutoFit/>
+          </a:bodyPr>
+          <a:lstStyle/>
+          <a:p>
+            <a:pPr algn="l"/>
+            <a:r>
+              <a:rPr sz="1000" b="0">
+                <a:solidFill>
+                  <a:srgbClr val="B0893E"/>
+                </a:solidFill>
+                <a:latin typeface="Calibri"/>
+              </a:rPr>
+              <a:t>EVIDENCE ROOM — AP AGENT OS   ·   Pack</a:t>
+            </a:r>
+          </a:p>
+        </p:txBody>
+      </p:sp>
+      <p:sp>
+        <p:nvSpPr>
+          <p:cNvPr id="5" name="TextBox 4"/>
+          <p:cNvSpPr txBox="1"/>
+          <p:nvPr/>
+        </p:nvSpPr>
+        <p:spPr>
+          <a:xfrm>
+            <a:off x="365760" y="502920"/>
+            <a:ext cx="8412480" cy="731520"/>
+          </a:xfrm>
+          <a:prstGeom prst="rect">
+            <a:avLst/>
+          </a:prstGeom>
+          <a:noFill/>
+        </p:spPr>
+        <p:txBody>
+          <a:bodyPr wrap="square">
+            <a:spAutoFit/>
+          </a:bodyPr>
+          <a:lstStyle/>
+          <a:p>
+            <a:pPr algn="l"/>
+            <a:r>
+              <a:rPr sz="2600" b="0">
+                <a:solidFill>
+                  <a:srgbClr val="12160F"/>
+                </a:solidFill>
+                <a:latin typeface="Georgia"/>
+              </a:rPr>
+              <a:t>Required artefacts or we do not sit</a:t>
+            </a:r>
+          </a:p>
+        </p:txBody>
+      </p:sp>
+      <p:sp>
+        <p:nvSpPr>
+          <p:cNvPr id="6" name="TextBox 5"/>
+          <p:cNvSpPr txBox="1"/>
+          <p:nvPr/>
+        </p:nvSpPr>
+        <p:spPr>
+          <a:xfrm>
+            <a:off x="365760" y="1371600"/>
+            <a:ext cx="8321040" cy="4937760"/>
+          </a:xfrm>
+          <a:prstGeom prst="rect">
+            <a:avLst/>
+          </a:prstGeom>
+          <a:noFill/>
+        </p:spPr>
+        <p:txBody>
+          <a:bodyPr wrap="square">
+            <a:spAutoFit/>
+          </a:bodyPr>
+          <a:lstStyle/>
+          <a:p>
+            <a:pPr>
+              <a:spcAft>
+                <a:spcPts val="800"/>
+              </a:spcAft>
+            </a:pPr>
+            <a:r>
+              <a:rPr sz="1600">
+                <a:solidFill>
+                  <a:srgbClr val="12160F"/>
+                </a:solidFill>
+                <a:latin typeface="Calibri"/>
+              </a:rPr>
+              <a:t>·  Scorecard with locked formulas and a named window.</a:t>
+            </a:r>
+          </a:p>
+          <a:p>
+            <a:pPr>
+              <a:spcAft>
+                <a:spcPts val="800"/>
+              </a:spcAft>
+            </a:pPr>
+            <a:r>
+              <a:rPr sz="1600">
+                <a:solidFill>
+                  <a:srgbClr val="12160F"/>
+                </a:solidFill>
+                <a:latin typeface="Calibri"/>
+              </a:rPr>
+              <a:t>·  Exception ageing by closed-list code and named owner.</a:t>
+            </a:r>
+          </a:p>
+          <a:p>
+            <a:pPr>
+              <a:spcAft>
+                <a:spcPts val="800"/>
+              </a:spcAft>
+            </a:pPr>
+            <a:r>
+              <a:rPr sz="1600">
+                <a:solidFill>
+                  <a:srgbClr val="12160F"/>
+                </a:solidFill>
+                <a:latin typeface="Calibri"/>
+              </a:rPr>
+              <a:t>·  Autonomy register — every live helper, including informal copilots.</a:t>
+            </a:r>
+          </a:p>
+          <a:p>
+            <a:pPr>
+              <a:spcAft>
+                <a:spcPts val="800"/>
+              </a:spcAft>
+            </a:pPr>
+            <a:r>
+              <a:rPr sz="1600">
+                <a:solidFill>
+                  <a:srgbClr val="12160F"/>
+                </a:solidFill>
+                <a:latin typeface="Calibri"/>
+              </a:rPr>
+              <a:t>·  Incidents, overrides, and rollback tests.</a:t>
+            </a:r>
+          </a:p>
+          <a:p>
+            <a:pPr>
+              <a:spcAft>
+                <a:spcPts val="800"/>
+              </a:spcAft>
+            </a:pPr>
+            <a:r>
+              <a:rPr sz="1600">
+                <a:solidFill>
+                  <a:srgbClr val="12160F"/>
+                </a:solidFill>
+                <a:latin typeface="Calibri"/>
+              </a:rPr>
+              <a:t>·  Cost of inference versus correct outcomes.</a:t>
+            </a:r>
+          </a:p>
+          <a:p>
+            <a:pPr>
+              <a:spcAft>
+                <a:spcPts val="800"/>
+              </a:spcAft>
+            </a:pPr>
+            <a:r>
+              <a:rPr sz="1600">
+                <a:solidFill>
+                  <a:srgbClr val="12160F"/>
+                </a:solidFill>
+                <a:latin typeface="Calibri"/>
+              </a:rPr>
+              <a:t>·  A written recommend / hold / demote for each agent in scope.</a:t>
+            </a:r>
+          </a:p>
+        </p:txBody>
+      </p:sp>
+    </p:spTree>
+  </p:cSld>
+  <p:clrMapOvr>
+    <a:masterClrMapping/>
+  </p:clrMapOvr>
+</p:sld>
+</file>
+
+<file path=ppt/slides/slide3.xml><?xml version="1.0" encoding="utf-8"?>
+<p:sld xmlns:a="http://schemas.openxmlformats.org/drawingml/2006/main" xmlns:p="http://schemas.openxmlformats.org/presentationml/2006/main" xmlns:r="http://schemas.openxmlformats.org/officeDocument/2006/relationships">
+  <p:cSld>
+    <p:spTree>
+      <p:nvGrpSpPr>
+        <p:cNvPr id="1" name=""/>
+        <p:cNvGrpSpPr/>
+        <p:nvPr/>
+      </p:nvGrpSpPr>
+      <p:grpSpPr/>
+      <p:sp>
+        <p:nvSpPr>
+          <p:cNvPr id="2" name="Rectangle 1"/>
+          <p:cNvSpPr/>
+          <p:nvPr/>
+        </p:nvSpPr>
+        <p:spPr>
+          <a:xfrm>
+            <a:off x="0" y="0"/>
+            <a:ext cx="9144000" cy="6858000"/>
+          </a:xfrm>
+          <a:prstGeom prst="rect">
+            <a:avLst/>
+          </a:prstGeom>
+          <a:solidFill>
+            <a:srgbClr val="F3EEE4"/>
+          </a:solidFill>
+          <a:ln>
+            <a:noFill/>
+          </a:ln>
+        </p:spPr>
+        <p:style>
+          <a:lnRef idx="1">
+            <a:schemeClr val="accent1"/>
+          </a:lnRef>
+          <a:fillRef idx="3">
+            <a:schemeClr val="accent1"/>
+          </a:fillRef>
+          <a:effectRef idx="2">
+            <a:schemeClr val="accent1"/>
+          </a:effectRef>
+          <a:fontRef idx="minor">
+            <a:schemeClr val="lt1"/>
+          </a:fontRef>
+        </p:style>
+        <p:txBody>
+          <a:bodyPr rtlCol="0" anchor="ctr"/>
+          <a:lstStyle/>
+          <a:p>
+            <a:pPr algn="ctr"/>
+          </a:p>
+        </p:txBody>
+      </p:sp>
+      <p:sp>
+        <p:nvSpPr>
+          <p:cNvPr id="3" name="Rectangle 2"/>
+          <p:cNvSpPr/>
+          <p:nvPr/>
+        </p:nvSpPr>
+        <p:spPr>
+          <a:xfrm>
+            <a:off x="0" y="0"/>
+            <a:ext cx="73152" cy="6858000"/>
+          </a:xfrm>
+          <a:prstGeom prst="rect">
+            <a:avLst/>
+          </a:prstGeom>
+          <a:solidFill>
+            <a:srgbClr val="B0893E"/>
+          </a:solidFill>
+          <a:ln>
+            <a:noFill/>
+          </a:ln>
+        </p:spPr>
+        <p:style>
+          <a:lnRef idx="1">
+            <a:schemeClr val="accent1"/>
+          </a:lnRef>
+          <a:fillRef idx="3">
+            <a:schemeClr val="accent1"/>
+          </a:fillRef>
+          <a:effectRef idx="2">
+            <a:schemeClr val="accent1"/>
+          </a:effectRef>
+          <a:fontRef idx="minor">
+            <a:schemeClr val="lt1"/>
+          </a:fontRef>
+        </p:style>
+        <p:txBody>
+          <a:bodyPr rtlCol="0" anchor="ctr"/>
+          <a:lstStyle/>
+          <a:p>
+            <a:pPr algn="ctr"/>
+          </a:p>
+        </p:txBody>
+      </p:sp>
+      <p:sp>
+        <p:nvSpPr>
+          <p:cNvPr id="4" name="TextBox 3"/>
+          <p:cNvSpPr txBox="1"/>
+          <p:nvPr/>
+        </p:nvSpPr>
+        <p:spPr>
+          <a:xfrm>
+            <a:off x="365760" y="164592"/>
+            <a:ext cx="8412480" cy="256032"/>
+          </a:xfrm>
+          <a:prstGeom prst="rect">
+            <a:avLst/>
+          </a:prstGeom>
+          <a:noFill/>
+        </p:spPr>
+        <p:txBody>
+          <a:bodyPr wrap="square">
+            <a:spAutoFit/>
+          </a:bodyPr>
+          <a:lstStyle/>
+          <a:p>
+            <a:pPr algn="l"/>
+            <a:r>
+              <a:rPr sz="1000" b="0">
+                <a:solidFill>
+                  <a:srgbClr val="B0893E"/>
+                </a:solidFill>
+                <a:latin typeface="Calibri"/>
+              </a:rPr>
+              <a:t>EVIDENCE ROOM — AP AGENT OS   ·   Ladder</a:t>
+            </a:r>
+          </a:p>
+        </p:txBody>
+      </p:sp>
+      <p:sp>
+        <p:nvSpPr>
+          <p:cNvPr id="5" name="TextBox 4"/>
+          <p:cNvSpPr txBox="1"/>
+          <p:nvPr/>
+        </p:nvSpPr>
+        <p:spPr>
+          <a:xfrm>
+            <a:off x="365760" y="502920"/>
+            <a:ext cx="8412480" cy="731520"/>
+          </a:xfrm>
+          <a:prstGeom prst="rect">
+            <a:avLst/>
+          </a:prstGeom>
+          <a:noFill/>
+        </p:spPr>
+        <p:txBody>
+          <a:bodyPr wrap="square">
+            <a:spAutoFit/>
+          </a:bodyPr>
+          <a:lstStyle/>
+          <a:p>
+            <a:pPr algn="l"/>
+            <a:r>
+              <a:rPr sz="2600" b="0">
+                <a:solidFill>
+                  <a:srgbClr val="12160F"/>
+                </a:solidFill>
+                <a:latin typeface="Georgia"/>
+              </a:rPr>
+              <a:t>What we are allowed to decide today</a:t>
+            </a:r>
+          </a:p>
+        </p:txBody>
+      </p:sp>
+      <p:sp>
+        <p:nvSpPr>
+          <p:cNvPr id="6" name="TextBox 5"/>
+          <p:cNvSpPr txBox="1"/>
+          <p:nvPr/>
+        </p:nvSpPr>
+        <p:spPr>
+          <a:xfrm>
+            <a:off x="365760" y="1371600"/>
+            <a:ext cx="8321040" cy="4937760"/>
+          </a:xfrm>
+          <a:prstGeom prst="rect">
+            <a:avLst/>
+          </a:prstGeom>
+          <a:noFill/>
+        </p:spPr>
+        <p:txBody>
+          <a:bodyPr wrap="square">
+            <a:spAutoFit/>
+          </a:bodyPr>
+          <a:lstStyle/>
+          <a:p>
+            <a:pPr>
+              <a:spcAft>
+                <a:spcPts val="800"/>
+              </a:spcAft>
+            </a:pPr>
+            <a:r>
+              <a:rPr sz="1600">
+                <a:solidFill>
+                  <a:srgbClr val="12160F"/>
+                </a:solidFill>
+                <a:latin typeface="Calibri"/>
+              </a:rPr>
+              <a:t>·  Hold at current level.</a:t>
+            </a:r>
+          </a:p>
+          <a:p>
+            <a:pPr>
+              <a:spcAft>
+                <a:spcPts val="800"/>
+              </a:spcAft>
+            </a:pPr>
+            <a:r>
+              <a:rPr sz="1600">
+                <a:solidFill>
+                  <a:srgbClr val="12160F"/>
+                </a:solidFill>
+                <a:latin typeface="Calibri"/>
+              </a:rPr>
+              <a:t>·  Demote (including to retired).</a:t>
+            </a:r>
+          </a:p>
+          <a:p>
+            <a:pPr>
+              <a:spcAft>
+                <a:spcPts val="800"/>
+              </a:spcAft>
+            </a:pPr>
+            <a:r>
+              <a:rPr sz="1600">
+                <a:solidFill>
+                  <a:srgbClr val="12160F"/>
+                </a:solidFill>
+                <a:latin typeface="Calibri"/>
+              </a:rPr>
+              <a:t>·  Promote one step if every gate item exists.</a:t>
+            </a:r>
+          </a:p>
+          <a:p>
+            <a:pPr>
+              <a:spcAft>
+                <a:spcPts val="800"/>
+              </a:spcAft>
+            </a:pPr>
+            <a:r>
+              <a:rPr sz="1600">
+                <a:solidFill>
+                  <a:srgbClr val="12160F"/>
+                </a:solidFill>
+                <a:latin typeface="Calibri"/>
+              </a:rPr>
+              <a:t>·  Refuse a new class of work.</a:t>
+            </a:r>
+          </a:p>
+          <a:p>
+            <a:pPr>
+              <a:spcAft>
+                <a:spcPts val="800"/>
+              </a:spcAft>
+            </a:pPr>
+            <a:r>
+              <a:rPr sz="1600">
+                <a:solidFill>
+                  <a:srgbClr val="12160F"/>
+                </a:solidFill>
+                <a:latin typeface="Calibri"/>
+              </a:rPr>
+              <a:t>·  We are not allowed to set a savings target as a substitute for a packet.</a:t>
+            </a:r>
+          </a:p>
+        </p:txBody>
+      </p:sp>
+    </p:spTree>
+  </p:cSld>
+  <p:clrMapOvr>
+    <a:masterClrMapping/>
+  </p:clrMapOvr>
+</p:sld>
+</file>
+
+<file path=ppt/slides/slide4.xml><?xml version="1.0" encoding="utf-8"?>
+<p:sld xmlns:a="http://schemas.openxmlformats.org/drawingml/2006/main" xmlns:p="http://schemas.openxmlformats.org/presentationml/2006/main" xmlns:r="http://schemas.openxmlformats.org/officeDocument/2006/relationships">
+  <p:cSld>
+    <p:spTree>
+      <p:nvGrpSpPr>
+        <p:cNvPr id="1" name=""/>
+        <p:cNvGrpSpPr/>
+        <p:nvPr/>
+      </p:nvGrpSpPr>
+      <p:grpSpPr/>
+      <p:sp>
+        <p:nvSpPr>
+          <p:cNvPr id="2" name="Rectangle 1"/>
+          <p:cNvSpPr/>
+          <p:nvPr/>
+        </p:nvSpPr>
+        <p:spPr>
+          <a:xfrm>
+            <a:off x="0" y="0"/>
+            <a:ext cx="9144000" cy="6858000"/>
+          </a:xfrm>
+          <a:prstGeom prst="rect">
+            <a:avLst/>
+          </a:prstGeom>
+          <a:solidFill>
+            <a:srgbClr val="F3EEE4"/>
+          </a:solidFill>
+          <a:ln>
+            <a:noFill/>
+          </a:ln>
+        </p:spPr>
+        <p:style>
+          <a:lnRef idx="1">
+            <a:schemeClr val="accent1"/>
+          </a:lnRef>
+          <a:fillRef idx="3">
+            <a:schemeClr val="accent1"/>
+          </a:fillRef>
+          <a:effectRef idx="2">
+            <a:schemeClr val="accent1"/>
+          </a:effectRef>
+          <a:fontRef idx="minor">
+            <a:schemeClr val="lt1"/>
+          </a:fontRef>
+        </p:style>
+        <p:txBody>
+          <a:bodyPr rtlCol="0" anchor="ctr"/>
+          <a:lstStyle/>
+          <a:p>
+            <a:pPr algn="ctr"/>
+          </a:p>
+        </p:txBody>
+      </p:sp>
+      <p:sp>
+        <p:nvSpPr>
+          <p:cNvPr id="3" name="Rectangle 2"/>
+          <p:cNvSpPr/>
+          <p:nvPr/>
+        </p:nvSpPr>
+        <p:spPr>
+          <a:xfrm>
+            <a:off x="0" y="0"/>
+            <a:ext cx="73152" cy="6858000"/>
+          </a:xfrm>
+          <a:prstGeom prst="rect">
+            <a:avLst/>
+          </a:prstGeom>
+          <a:solidFill>
+            <a:srgbClr val="B0893E"/>
+          </a:solidFill>
+          <a:ln>
+            <a:noFill/>
+          </a:ln>
+        </p:spPr>
+        <p:style>
+          <a:lnRef idx="1">
+            <a:schemeClr val="accent1"/>
+          </a:lnRef>
+          <a:fillRef idx="3">
+            <a:schemeClr val="accent1"/>
+          </a:fillRef>
+          <a:effectRef idx="2">
+            <a:schemeClr val="accent1"/>
+          </a:effectRef>
+          <a:fontRef idx="minor">
+            <a:schemeClr val="lt1"/>
+          </a:fontRef>
+        </p:style>
+        <p:txBody>
+          <a:bodyPr rtlCol="0" anchor="ctr"/>
+          <a:lstStyle/>
+          <a:p>
+            <a:pPr algn="ctr"/>
+          </a:p>
+        </p:txBody>
+      </p:sp>
+      <p:sp>
+        <p:nvSpPr>
+          <p:cNvPr id="4" name="TextBox 3"/>
+          <p:cNvSpPr txBox="1"/>
+          <p:nvPr/>
+        </p:nvSpPr>
+        <p:spPr>
+          <a:xfrm>
+            <a:off x="365760" y="164592"/>
+            <a:ext cx="8412480" cy="256032"/>
+          </a:xfrm>
+          <a:prstGeom prst="rect">
+            <a:avLst/>
+          </a:prstGeom>
+          <a:noFill/>
+        </p:spPr>
+        <p:txBody>
+          <a:bodyPr wrap="square">
+            <a:spAutoFit/>
+          </a:bodyPr>
+          <a:lstStyle/>
+          <a:p>
+            <a:pPr algn="l"/>
+            <a:r>
+              <a:rPr sz="1000" b="0">
+                <a:solidFill>
+                  <a:srgbClr val="B0893E"/>
+                </a:solidFill>
+                <a:latin typeface="Calibri"/>
+              </a:rPr>
+              <a:t>EVIDENCE ROOM — AP AGENT OS   ·   Gates</a:t>
+            </a:r>
+          </a:p>
+        </p:txBody>
+      </p:sp>
+      <p:sp>
+        <p:nvSpPr>
+          <p:cNvPr id="5" name="TextBox 4"/>
+          <p:cNvSpPr txBox="1"/>
+          <p:nvPr/>
+        </p:nvSpPr>
+        <p:spPr>
+          <a:xfrm>
+            <a:off x="365760" y="502920"/>
+            <a:ext cx="8412480" cy="548640"/>
+          </a:xfrm>
+          <a:prstGeom prst="rect">
+            <a:avLst/>
+          </a:prstGeom>
+          <a:noFill/>
+        </p:spPr>
+        <p:txBody>
+          <a:bodyPr wrap="square">
+            <a:spAutoFit/>
+          </a:bodyPr>
+          <a:lstStyle/>
+          <a:p>
+            <a:pPr algn="l"/>
+            <a:r>
+              <a:rPr sz="2400" b="0">
+                <a:solidFill>
+                  <a:srgbClr val="12160F"/>
+                </a:solidFill>
+                <a:latin typeface="Georgia"/>
+              </a:rPr>
+              <a:t>Promotion is change-controlled</a:t>
+            </a:r>
+          </a:p>
+        </p:txBody>
+      </p:sp>
+      <p:sp>
+        <p:nvSpPr>
+          <p:cNvPr id="6" name="Rectangle 5"/>
+          <p:cNvSpPr/>
+          <p:nvPr/>
+        </p:nvSpPr>
+        <p:spPr>
+          <a:xfrm>
+            <a:off x="365760" y="1234440"/>
+            <a:ext cx="4023360" cy="5029200"/>
+          </a:xfrm>
+          <a:prstGeom prst="rect">
+            <a:avLst/>
+          </a:prstGeom>
+          <a:solidFill>
+            <a:srgbClr val="FAF8F3"/>
+          </a:solidFill>
+          <a:ln>
+            <a:noFill/>
+          </a:ln>
+        </p:spPr>
+        <p:style>
+          <a:lnRef idx="1">
+            <a:schemeClr val="accent1"/>
+          </a:lnRef>
+          <a:fillRef idx="3">
+            <a:schemeClr val="accent1"/>
+          </a:fillRef>
+          <a:effectRef idx="2">
+            <a:schemeClr val="accent1"/>
+          </a:effectRef>
+          <a:fontRef idx="minor">
+            <a:schemeClr val="lt1"/>
+          </a:fontRef>
+        </p:style>
+        <p:txBody>
+          <a:bodyPr rtlCol="0" anchor="ctr"/>
+          <a:lstStyle/>
+          <a:p>
+            <a:pPr algn="ctr"/>
+          </a:p>
+        </p:txBody>
+      </p:sp>
+      <p:sp>
+        <p:nvSpPr>
+          <p:cNvPr id="7" name="Rectangle 6"/>
+          <p:cNvSpPr/>
+          <p:nvPr/>
+        </p:nvSpPr>
+        <p:spPr>
+          <a:xfrm>
+            <a:off x="4754880" y="1234440"/>
+            <a:ext cx="4023360" cy="5029200"/>
+          </a:xfrm>
+          <a:prstGeom prst="rect">
+            <a:avLst/>
+          </a:prstGeom>
+          <a:solidFill>
+            <a:srgbClr val="FAF8F3"/>
+          </a:solidFill>
+          <a:ln>
+            <a:noFill/>
+          </a:ln>
+        </p:spPr>
+        <p:style>
+          <a:lnRef idx="1">
+            <a:schemeClr val="accent1"/>
+          </a:lnRef>
+          <a:fillRef idx="3">
+            <a:schemeClr val="accent1"/>
+          </a:fillRef>
+          <a:effectRef idx="2">
+            <a:schemeClr val="accent1"/>
+          </a:effectRef>
+          <a:fontRef idx="minor">
+            <a:schemeClr val="lt1"/>
+          </a:fontRef>
+        </p:style>
+        <p:txBody>
+          <a:bodyPr rtlCol="0" anchor="ctr"/>
+          <a:lstStyle/>
+          <a:p>
+            <a:pPr algn="ctr"/>
+          </a:p>
+        </p:txBody>
+      </p:sp>
+      <p:sp>
+        <p:nvSpPr>
+          <p:cNvPr id="8" name="TextBox 7"/>
+          <p:cNvSpPr txBox="1"/>
+          <p:nvPr/>
+        </p:nvSpPr>
+        <p:spPr>
+          <a:xfrm>
+            <a:off x="502920" y="1371600"/>
+            <a:ext cx="3749039" cy="365760"/>
+          </a:xfrm>
+          <a:prstGeom prst="rect">
+            <a:avLst/>
+          </a:prstGeom>
+          <a:noFill/>
+        </p:spPr>
+        <p:txBody>
+          <a:bodyPr wrap="square">
+            <a:spAutoFit/>
+          </a:bodyPr>
+          <a:lstStyle/>
+          <a:p>
+            <a:pPr algn="l"/>
+            <a:r>
+              <a:rPr sz="1400" b="1">
+                <a:solidFill>
+                  <a:srgbClr val="B0893E"/>
+                </a:solidFill>
+                <a:latin typeface="Calibri"/>
+              </a:rPr>
+              <a:t>Must exist</a:t>
+            </a:r>
+          </a:p>
+        </p:txBody>
+      </p:sp>
+      <p:sp>
+        <p:nvSpPr>
+          <p:cNvPr id="9" name="TextBox 8"/>
+          <p:cNvSpPr txBox="1"/>
+          <p:nvPr/>
+        </p:nvSpPr>
+        <p:spPr>
+          <a:xfrm>
+            <a:off x="502920" y="1828800"/>
+            <a:ext cx="3749039" cy="4206240"/>
+          </a:xfrm>
+          <a:prstGeom prst="rect">
+            <a:avLst/>
+          </a:prstGeom>
+          <a:noFill/>
+        </p:spPr>
+        <p:txBody>
+          <a:bodyPr wrap="square">
+            <a:spAutoFit/>
+          </a:bodyPr>
+          <a:lstStyle/>
+          <a:p>
+            <a:pPr>
+              <a:spcAft>
+                <a:spcPts val="800"/>
+              </a:spcAft>
+            </a:pPr>
+            <a:r>
+              <a:rPr sz="1400">
+                <a:solidFill>
+                  <a:srgbClr val="12160F"/>
+                </a:solidFill>
+                <a:latin typeface="Calibri"/>
+              </a:rPr>
+              <a:t>·  Signed charter</a:t>
+            </a:r>
+          </a:p>
+          <a:p>
+            <a:pPr>
+              <a:spcAft>
+                <a:spcPts val="800"/>
+              </a:spcAft>
+            </a:pPr>
+            <a:r>
+              <a:rPr sz="1400">
+                <a:solidFill>
+                  <a:srgbClr val="12160F"/>
+                </a:solidFill>
+                <a:latin typeface="Calibri"/>
+              </a:rPr>
+              <a:t>·  Gate pack (gold-label + shadow)</a:t>
+            </a:r>
+          </a:p>
+          <a:p>
+            <a:pPr>
+              <a:spcAft>
+                <a:spcPts val="800"/>
+              </a:spcAft>
+            </a:pPr>
+            <a:r>
+              <a:rPr sz="1400">
+                <a:solidFill>
+                  <a:srgbClr val="12160F"/>
+                </a:solidFill>
+                <a:latin typeface="Calibri"/>
+              </a:rPr>
+              <a:t>·  Limit table</a:t>
+            </a:r>
+          </a:p>
+          <a:p>
+            <a:pPr>
+              <a:spcAft>
+                <a:spcPts val="800"/>
+              </a:spcAft>
+            </a:pPr>
+            <a:r>
+              <a:rPr sz="1400">
+                <a:solidFill>
+                  <a:srgbClr val="12160F"/>
+                </a:solidFill>
+                <a:latin typeface="Calibri"/>
+              </a:rPr>
+              <a:t>·  Detection path</a:t>
+            </a:r>
+          </a:p>
+          <a:p>
+            <a:pPr>
+              <a:spcAft>
+                <a:spcPts val="800"/>
+              </a:spcAft>
+            </a:pPr>
+            <a:r>
+              <a:rPr sz="1400">
+                <a:solidFill>
+                  <a:srgbClr val="12160F"/>
+                </a:solidFill>
+                <a:latin typeface="Calibri"/>
+              </a:rPr>
+              <a:t>·  One-hour rollback</a:t>
+            </a:r>
+          </a:p>
+          <a:p>
+            <a:pPr>
+              <a:spcAft>
+                <a:spcPts val="800"/>
+              </a:spcAft>
+            </a:pPr>
+            <a:r>
+              <a:rPr sz="1400">
+                <a:solidFill>
+                  <a:srgbClr val="12160F"/>
+                </a:solidFill>
+                <a:latin typeface="Calibri"/>
+              </a:rPr>
+              <a:t>·  Named sign-offs</a:t>
+            </a:r>
+          </a:p>
+          <a:p>
+            <a:pPr>
+              <a:spcAft>
+                <a:spcPts val="800"/>
+              </a:spcAft>
+            </a:pPr>
+            <a:r>
+              <a:rPr sz="1400">
+                <a:solidFill>
+                  <a:srgbClr val="12160F"/>
+                </a:solidFill>
+                <a:latin typeface="Calibri"/>
+              </a:rPr>
+              <a:t>·  Register entry</a:t>
+            </a:r>
+          </a:p>
+        </p:txBody>
+      </p:sp>
+      <p:sp>
+        <p:nvSpPr>
+          <p:cNvPr id="10" name="TextBox 9"/>
+          <p:cNvSpPr txBox="1"/>
+          <p:nvPr/>
+        </p:nvSpPr>
+        <p:spPr>
+          <a:xfrm>
+            <a:off x="4892040" y="1371600"/>
+            <a:ext cx="3749039" cy="365760"/>
+          </a:xfrm>
+          <a:prstGeom prst="rect">
+            <a:avLst/>
+          </a:prstGeom>
+          <a:noFill/>
+        </p:spPr>
+        <p:txBody>
+          <a:bodyPr wrap="square">
+            <a:spAutoFit/>
+          </a:bodyPr>
+          <a:lstStyle/>
+          <a:p>
+            <a:pPr algn="l"/>
+            <a:r>
+              <a:rPr sz="1400" b="1">
+                <a:solidFill>
+                  <a:srgbClr val="B0893E"/>
+                </a:solidFill>
+                <a:latin typeface="Calibri"/>
+              </a:rPr>
+              <a:t>Automatic decline</a:t>
+            </a:r>
+          </a:p>
+        </p:txBody>
+      </p:sp>
+      <p:sp>
+        <p:nvSpPr>
+          <p:cNvPr id="11" name="TextBox 10"/>
+          <p:cNvSpPr txBox="1"/>
+          <p:nvPr/>
+        </p:nvSpPr>
+        <p:spPr>
+          <a:xfrm>
+            <a:off x="4892040" y="1828800"/>
+            <a:ext cx="3749039" cy="4206240"/>
+          </a:xfrm>
+          <a:prstGeom prst="rect">
+            <a:avLst/>
+          </a:prstGeom>
+          <a:noFill/>
+        </p:spPr>
+        <p:txBody>
+          <a:bodyPr wrap="square">
+            <a:spAutoFit/>
+          </a:bodyPr>
+          <a:lstStyle/>
+          <a:p>
+            <a:pPr>
+              <a:spcAft>
+                <a:spcPts val="800"/>
+              </a:spcAft>
+            </a:pPr>
+            <a:r>
+              <a:rPr sz="1400">
+                <a:solidFill>
+                  <a:srgbClr val="12160F"/>
+                </a:solidFill>
+                <a:latin typeface="Calibri"/>
+              </a:rPr>
+              <a:t>·  Any item missing</a:t>
+            </a:r>
+          </a:p>
+          <a:p>
+            <a:pPr>
+              <a:spcAft>
+                <a:spcPts val="800"/>
+              </a:spcAft>
+            </a:pPr>
+            <a:r>
+              <a:rPr sz="1400">
+                <a:solidFill>
+                  <a:srgbClr val="12160F"/>
+                </a:solidFill>
+                <a:latin typeface="Calibri"/>
+              </a:rPr>
+              <a:t>·  Payment in the proposed rights</a:t>
+            </a:r>
+          </a:p>
+          <a:p>
+            <a:pPr>
+              <a:spcAft>
+                <a:spcPts val="800"/>
+              </a:spcAft>
+            </a:pPr>
+            <a:r>
+              <a:rPr sz="1400">
+                <a:solidFill>
+                  <a:srgbClr val="12160F"/>
+                </a:solidFill>
+                <a:latin typeface="Calibri"/>
+              </a:rPr>
+              <a:t>·  Vendor-bank write in the tools list</a:t>
+            </a:r>
+          </a:p>
+          <a:p>
+            <a:pPr>
+              <a:spcAft>
+                <a:spcPts val="800"/>
+              </a:spcAft>
+            </a:pPr>
+            <a:r>
+              <a:rPr sz="1400">
+                <a:solidFill>
+                  <a:srgbClr val="12160F"/>
+                </a:solidFill>
+                <a:latin typeface="Calibri"/>
+              </a:rPr>
+              <a:t>·  Dummy GR or invented PO in the sample</a:t>
+            </a:r>
+          </a:p>
+          <a:p>
+            <a:pPr>
+              <a:spcAft>
+                <a:spcPts val="800"/>
+              </a:spcAft>
+            </a:pPr>
+            <a:r>
+              <a:rPr sz="1400">
+                <a:solidFill>
+                  <a:srgbClr val="12160F"/>
+                </a:solidFill>
+                <a:latin typeface="Calibri"/>
+              </a:rPr>
+              <a:t>·  Unofficial copilot discovered on the path</a:t>
+            </a:r>
+          </a:p>
+        </p:txBody>
+      </p:sp>
+    </p:spTree>
+  </p:cSld>
+  <p:clrMapOvr>
+    <a:masterClrMapping/>
+  </p:clrMapOvr>
+</p:sld>
+</file>
+
+<file path=ppt/slides/slide5.xml><?xml version="1.0" encoding="utf-8"?>
+<p:sld xmlns:a="http://schemas.openxmlformats.org/drawingml/2006/main" xmlns:p="http://schemas.openxmlformats.org/presentationml/2006/main" xmlns:r="http://schemas.openxmlformats.org/officeDocument/2006/relationships">
+  <p:cSld>
+    <p:spTree>
+      <p:nvGrpSpPr>
+        <p:cNvPr id="1" name=""/>
+        <p:cNvGrpSpPr/>
+        <p:nvPr/>
+      </p:nvGrpSpPr>
+      <p:grpSpPr/>
+      <p:sp>
+        <p:nvSpPr>
+          <p:cNvPr id="2" name="Rectangle 1"/>
+          <p:cNvSpPr/>
+          <p:nvPr/>
+        </p:nvSpPr>
+        <p:spPr>
+          <a:xfrm>
+            <a:off x="0" y="0"/>
+            <a:ext cx="9144000" cy="6858000"/>
+          </a:xfrm>
+          <a:prstGeom prst="rect">
+            <a:avLst/>
+          </a:prstGeom>
+          <a:solidFill>
+            <a:srgbClr val="F3EEE4"/>
+          </a:solidFill>
+          <a:ln>
+            <a:noFill/>
+          </a:ln>
+        </p:spPr>
+        <p:style>
+          <a:lnRef idx="1">
+            <a:schemeClr val="accent1"/>
+          </a:lnRef>
+          <a:fillRef idx="3">
+            <a:schemeClr val="accent1"/>
+          </a:fillRef>
+          <a:effectRef idx="2">
+            <a:schemeClr val="accent1"/>
+          </a:effectRef>
+          <a:fontRef idx="minor">
+            <a:schemeClr val="lt1"/>
+          </a:fontRef>
+        </p:style>
+        <p:txBody>
+          <a:bodyPr rtlCol="0" anchor="ctr"/>
+          <a:lstStyle/>
+          <a:p>
+            <a:pPr algn="ctr"/>
+          </a:p>
+        </p:txBody>
+      </p:sp>
+      <p:sp>
+        <p:nvSpPr>
+          <p:cNvPr id="3" name="Rectangle 2"/>
+          <p:cNvSpPr/>
+          <p:nvPr/>
+        </p:nvSpPr>
+        <p:spPr>
+          <a:xfrm>
+            <a:off x="0" y="0"/>
+            <a:ext cx="73152" cy="6858000"/>
+          </a:xfrm>
+          <a:prstGeom prst="rect">
+            <a:avLst/>
+          </a:prstGeom>
+          <a:solidFill>
+            <a:srgbClr val="B0893E"/>
+          </a:solidFill>
+          <a:ln>
+            <a:noFill/>
+          </a:ln>
+        </p:spPr>
+        <p:style>
+          <a:lnRef idx="1">
+            <a:schemeClr val="accent1"/>
+          </a:lnRef>
+          <a:fillRef idx="3">
+            <a:schemeClr val="accent1"/>
+          </a:fillRef>
+          <a:effectRef idx="2">
+            <a:schemeClr val="accent1"/>
+          </a:effectRef>
+          <a:fontRef idx="minor">
+            <a:schemeClr val="lt1"/>
+          </a:fontRef>
+        </p:style>
+        <p:txBody>
+          <a:bodyPr rtlCol="0" anchor="ctr"/>
+          <a:lstStyle/>
+          <a:p>
+            <a:pPr algn="ctr"/>
+          </a:p>
+        </p:txBody>
+      </p:sp>
+      <p:sp>
+        <p:nvSpPr>
+          <p:cNvPr id="4" name="TextBox 3"/>
+          <p:cNvSpPr txBox="1"/>
+          <p:nvPr/>
+        </p:nvSpPr>
+        <p:spPr>
+          <a:xfrm>
+            <a:off x="365760" y="164592"/>
+            <a:ext cx="8412480" cy="256032"/>
+          </a:xfrm>
+          <a:prstGeom prst="rect">
+            <a:avLst/>
+          </a:prstGeom>
+          <a:noFill/>
+        </p:spPr>
+        <p:txBody>
+          <a:bodyPr wrap="square">
+            <a:spAutoFit/>
+          </a:bodyPr>
+          <a:lstStyle/>
+          <a:p>
+            <a:pPr algn="l"/>
+            <a:r>
+              <a:rPr sz="1000" b="0">
+                <a:solidFill>
+                  <a:srgbClr val="B0893E"/>
+                </a:solidFill>
+                <a:latin typeface="Calibri"/>
+              </a:rPr>
+              <a:t>EVIDENCE ROOM — AP AGENT OS   ·   Payment</a:t>
+            </a:r>
+          </a:p>
+        </p:txBody>
+      </p:sp>
+      <p:sp>
+        <p:nvSpPr>
+          <p:cNvPr id="5" name="TextBox 4"/>
+          <p:cNvSpPr txBox="1"/>
+          <p:nvPr/>
+        </p:nvSpPr>
+        <p:spPr>
+          <a:xfrm>
+            <a:off x="365760" y="502920"/>
+            <a:ext cx="8412480" cy="731520"/>
+          </a:xfrm>
+          <a:prstGeom prst="rect">
+            <a:avLst/>
+          </a:prstGeom>
+          <a:noFill/>
+        </p:spPr>
+        <p:txBody>
+          <a:bodyPr wrap="square">
+            <a:spAutoFit/>
+          </a:bodyPr>
+          <a:lstStyle/>
+          <a:p>
+            <a:pPr algn="l"/>
+            <a:r>
+              <a:rPr sz="2600" b="0">
+                <a:solidFill>
+                  <a:srgbClr val="12160F"/>
+                </a:solidFill>
+                <a:latin typeface="Georgia"/>
+              </a:rPr>
+              <a:t>Hard ceiling — not a steering topic</a:t>
+            </a:r>
+          </a:p>
+        </p:txBody>
+      </p:sp>
+      <p:sp>
+        <p:nvSpPr>
+          <p:cNvPr id="6" name="TextBox 5"/>
+          <p:cNvSpPr txBox="1"/>
+          <p:nvPr/>
+        </p:nvSpPr>
+        <p:spPr>
+          <a:xfrm>
+            <a:off x="365760" y="1371600"/>
+            <a:ext cx="8321040" cy="4937760"/>
+          </a:xfrm>
+          <a:prstGeom prst="rect">
+            <a:avLst/>
+          </a:prstGeom>
+          <a:noFill/>
+        </p:spPr>
+        <p:txBody>
+          <a:bodyPr wrap="square">
+            <a:spAutoFit/>
+          </a:bodyPr>
+          <a:lstStyle/>
+          <a:p>
+            <a:pPr>
+              <a:spcAft>
+                <a:spcPts val="800"/>
+              </a:spcAft>
+            </a:pPr>
+            <a:r>
+              <a:rPr sz="1600">
+                <a:solidFill>
+                  <a:srgbClr val="12160F"/>
+                </a:solidFill>
+                <a:latin typeface="Calibri"/>
+              </a:rPr>
+              <a:t>·  Agent 12 annotates payment proposals.</a:t>
+            </a:r>
+          </a:p>
+          <a:p>
+            <a:pPr>
+              <a:spcAft>
+                <a:spcPts val="800"/>
+              </a:spcAft>
+            </a:pPr>
+            <a:r>
+              <a:rPr sz="1600">
+                <a:solidFill>
+                  <a:srgbClr val="12160F"/>
+                </a:solidFill>
+                <a:latin typeface="Calibri"/>
+              </a:rPr>
+              <a:t>·  Dual humans release.</a:t>
+            </a:r>
+          </a:p>
+          <a:p>
+            <a:pPr>
+              <a:spcAft>
+                <a:spcPts val="800"/>
+              </a:spcAft>
+            </a:pPr>
+            <a:r>
+              <a:rPr sz="1600">
+                <a:solidFill>
+                  <a:srgbClr val="12160F"/>
+                </a:solidFill>
+                <a:latin typeface="Calibri"/>
+              </a:rPr>
+              <a:t>·  There is no L3 for payment.</a:t>
+            </a:r>
+          </a:p>
+          <a:p>
+            <a:pPr>
+              <a:spcAft>
+                <a:spcPts val="800"/>
+              </a:spcAft>
+            </a:pPr>
+            <a:r>
+              <a:rPr sz="1600">
+                <a:solidFill>
+                  <a:srgbClr val="12160F"/>
+                </a:solidFill>
+                <a:latin typeface="Calibri"/>
+              </a:rPr>
+              <a:t>·  If C1 is absent, Agent 12 remains CLOSED.</a:t>
+            </a:r>
+          </a:p>
+        </p:txBody>
+      </p:sp>
+    </p:spTree>
+  </p:cSld>
+  <p:clrMapOvr>
+    <a:masterClrMapping/>
+  </p:clrMapOvr>
+</p:sld>
+</file>
+
+<file path=ppt/slides/slide6.xml><?xml version="1.0" encoding="utf-8"?>
+<p:sld xmlns:a="http://schemas.openxmlformats.org/drawingml/2006/main" xmlns:p="http://schemas.openxmlformats.org/presentationml/2006/main" xmlns:r="http://schemas.openxmlformats.org/officeDocument/2006/relationships">
+  <p:cSld>
+    <p:spTree>
+      <p:nvGrpSpPr>
+        <p:cNvPr id="1" name=""/>
+        <p:cNvGrpSpPr/>
+        <p:nvPr/>
+      </p:nvGrpSpPr>
+      <p:grpSpPr/>
+      <p:sp>
+        <p:nvSpPr>
+          <p:cNvPr id="2" name="Rectangle 1"/>
+          <p:cNvSpPr/>
+          <p:nvPr/>
+        </p:nvSpPr>
+        <p:spPr>
+          <a:xfrm>
+            <a:off x="0" y="0"/>
+            <a:ext cx="9144000" cy="6858000"/>
+          </a:xfrm>
+          <a:prstGeom prst="rect">
+            <a:avLst/>
+          </a:prstGeom>
+          <a:solidFill>
+            <a:srgbClr val="F3EEE4"/>
+          </a:solidFill>
+          <a:ln>
+            <a:noFill/>
+          </a:ln>
+        </p:spPr>
+        <p:style>
+          <a:lnRef idx="1">
+            <a:schemeClr val="accent1"/>
+          </a:lnRef>
+          <a:fillRef idx="3">
+            <a:schemeClr val="accent1"/>
+          </a:fillRef>
+          <a:effectRef idx="2">
+            <a:schemeClr val="accent1"/>
+          </a:effectRef>
+          <a:fontRef idx="minor">
+            <a:schemeClr val="lt1"/>
+          </a:fontRef>
+        </p:style>
+        <p:txBody>
+          <a:bodyPr rtlCol="0" anchor="ctr"/>
+          <a:lstStyle/>
+          <a:p>
+            <a:pPr algn="ctr"/>
+          </a:p>
+        </p:txBody>
+      </p:sp>
+      <p:sp>
+        <p:nvSpPr>
+          <p:cNvPr id="3" name="Rectangle 2"/>
+          <p:cNvSpPr/>
+          <p:nvPr/>
+        </p:nvSpPr>
+        <p:spPr>
+          <a:xfrm>
+            <a:off x="0" y="0"/>
+            <a:ext cx="73152" cy="6858000"/>
+          </a:xfrm>
+          <a:prstGeom prst="rect">
+            <a:avLst/>
+          </a:prstGeom>
+          <a:solidFill>
+            <a:srgbClr val="B0893E"/>
+          </a:solidFill>
+          <a:ln>
+            <a:noFill/>
+          </a:ln>
+        </p:spPr>
+        <p:style>
+          <a:lnRef idx="1">
+            <a:schemeClr val="accent1"/>
+          </a:lnRef>
+          <a:fillRef idx="3">
+            <a:schemeClr val="accent1"/>
+          </a:fillRef>
+          <a:effectRef idx="2">
+            <a:schemeClr val="accent1"/>
+          </a:effectRef>
+          <a:fontRef idx="minor">
+            <a:schemeClr val="lt1"/>
+          </a:fontRef>
+        </p:style>
+        <p:txBody>
+          <a:bodyPr rtlCol="0" anchor="ctr"/>
+          <a:lstStyle/>
+          <a:p>
+            <a:pPr algn="ctr"/>
+          </a:p>
+        </p:txBody>
+      </p:sp>
+      <p:sp>
+        <p:nvSpPr>
+          <p:cNvPr id="4" name="TextBox 3"/>
+          <p:cNvSpPr txBox="1"/>
+          <p:nvPr/>
+        </p:nvSpPr>
+        <p:spPr>
+          <a:xfrm>
+            <a:off x="365760" y="164592"/>
+            <a:ext cx="8412480" cy="256032"/>
+          </a:xfrm>
+          <a:prstGeom prst="rect">
+            <a:avLst/>
+          </a:prstGeom>
+          <a:noFill/>
+        </p:spPr>
+        <p:txBody>
+          <a:bodyPr wrap="square">
+            <a:spAutoFit/>
+          </a:bodyPr>
+          <a:lstStyle/>
+          <a:p>
+            <a:pPr algn="l"/>
+            <a:r>
+              <a:rPr sz="1000" b="0">
+                <a:solidFill>
+                  <a:srgbClr val="B0893E"/>
+                </a:solidFill>
+                <a:latin typeface="Calibri"/>
+              </a:rPr>
+              <a:t>EVIDENCE ROOM — AP AGENT OS   ·   Risk</a:t>
+            </a:r>
+          </a:p>
+        </p:txBody>
+      </p:sp>
+      <p:sp>
+        <p:nvSpPr>
+          <p:cNvPr id="5" name="TextBox 4"/>
+          <p:cNvSpPr txBox="1"/>
+          <p:nvPr/>
+        </p:nvSpPr>
+        <p:spPr>
+          <a:xfrm>
+            <a:off x="365760" y="502920"/>
+            <a:ext cx="8412480" cy="731520"/>
+          </a:xfrm>
+          <a:prstGeom prst="rect">
+            <a:avLst/>
+          </a:prstGeom>
+          <a:noFill/>
+        </p:spPr>
+        <p:txBody>
+          <a:bodyPr wrap="square">
+            <a:spAutoFit/>
+          </a:bodyPr>
+          <a:lstStyle/>
+          <a:p>
+            <a:pPr algn="l"/>
+            <a:r>
+              <a:rPr sz="2600" b="0">
+                <a:solidFill>
+                  <a:srgbClr val="12160F"/>
+                </a:solidFill>
+                <a:latin typeface="Georgia"/>
+              </a:rPr>
+              <a:t>Questions the challenger asks</a:t>
+            </a:r>
+          </a:p>
+        </p:txBody>
+      </p:sp>
+      <p:sp>
+        <p:nvSpPr>
+          <p:cNvPr id="6" name="TextBox 5"/>
+          <p:cNvSpPr txBox="1"/>
+          <p:nvPr/>
+        </p:nvSpPr>
+        <p:spPr>
+          <a:xfrm>
+            <a:off x="365760" y="1371600"/>
+            <a:ext cx="8321040" cy="4937760"/>
+          </a:xfrm>
+          <a:prstGeom prst="rect">
+            <a:avLst/>
+          </a:prstGeom>
+          <a:noFill/>
+        </p:spPr>
+        <p:txBody>
+          <a:bodyPr wrap="square">
+            <a:spAutoFit/>
+          </a:bodyPr>
+          <a:lstStyle/>
+          <a:p>
+            <a:pPr>
+              <a:spcAft>
+                <a:spcPts val="800"/>
+              </a:spcAft>
+            </a:pPr>
+            <a:r>
+              <a:rPr sz="1600">
+                <a:solidFill>
+                  <a:srgbClr val="12160F"/>
+                </a:solidFill>
+                <a:latin typeface="Calibri"/>
+              </a:rPr>
+              <a:t>·  Show me the artefact — not the dashboard.</a:t>
+            </a:r>
+          </a:p>
+          <a:p>
+            <a:pPr>
+              <a:spcAft>
+                <a:spcPts val="800"/>
+              </a:spcAft>
+            </a:pPr>
+            <a:r>
+              <a:rPr sz="1600">
+                <a:solidFill>
+                  <a:srgbClr val="12160F"/>
+                </a:solidFill>
+                <a:latin typeface="Calibri"/>
+              </a:rPr>
+              <a:t>·  Who is Accountable? An agent cannot hold A.</a:t>
+            </a:r>
+          </a:p>
+          <a:p>
+            <a:pPr>
+              <a:spcAft>
+                <a:spcPts val="800"/>
+              </a:spcAft>
+            </a:pPr>
+            <a:r>
+              <a:rPr sz="1600">
+                <a:solidFill>
+                  <a:srgbClr val="12160F"/>
+                </a:solidFill>
+                <a:latin typeface="Calibri"/>
+              </a:rPr>
+              <a:t>·  What happens in one hour if we roll back?</a:t>
+            </a:r>
+          </a:p>
+          <a:p>
+            <a:pPr>
+              <a:spcAft>
+                <a:spcPts val="800"/>
+              </a:spcAft>
+            </a:pPr>
+            <a:r>
+              <a:rPr sz="1600">
+                <a:solidFill>
+                  <a:srgbClr val="12160F"/>
+                </a:solidFill>
+                <a:latin typeface="Calibri"/>
+              </a:rPr>
+              <a:t>·  Which informal helpers are not on the register?</a:t>
+            </a:r>
+          </a:p>
+          <a:p>
+            <a:pPr>
+              <a:spcAft>
+                <a:spcPts val="800"/>
+              </a:spcAft>
+            </a:pPr>
+            <a:r>
+              <a:rPr sz="1600">
+                <a:solidFill>
+                  <a:srgbClr val="12160F"/>
+                </a:solidFill>
+                <a:latin typeface="Calibri"/>
+              </a:rPr>
+              <a:t>·  Where did a model invent a receipt, a PO, or a bank account?</a:t>
+            </a:r>
+          </a:p>
+        </p:txBody>
+      </p:sp>
+    </p:spTree>
+  </p:cSld>
+  <p:clrMapOvr>
+    <a:masterClrMapping/>
+  </p:clrMapOvr>
+</p:sld>
+</file>
+
+<file path=ppt/slides/slide7.xml><?xml version="1.0" encoding="utf-8"?>
+<p:sld xmlns:a="http://schemas.openxmlformats.org/drawingml/2006/main" xmlns:p="http://schemas.openxmlformats.org/presentationml/2006/main" xmlns:r="http://schemas.openxmlformats.org/officeDocument/2006/relationships">
+  <p:cSld>
+    <p:spTree>
+      <p:nvGrpSpPr>
+        <p:cNvPr id="1" name=""/>
+        <p:cNvGrpSpPr/>
+        <p:nvPr/>
+      </p:nvGrpSpPr>
+      <p:grpSpPr/>
+      <p:sp>
+        <p:nvSpPr>
+          <p:cNvPr id="2" name="Rectangle 1"/>
+          <p:cNvSpPr/>
+          <p:nvPr/>
+        </p:nvSpPr>
+        <p:spPr>
+          <a:xfrm>
+            <a:off x="0" y="0"/>
+            <a:ext cx="9144000" cy="6858000"/>
+          </a:xfrm>
+          <a:prstGeom prst="rect">
+            <a:avLst/>
+          </a:prstGeom>
+          <a:solidFill>
+            <a:srgbClr val="F3EEE4"/>
+          </a:solidFill>
+          <a:ln>
+            <a:noFill/>
+          </a:ln>
+        </p:spPr>
+        <p:style>
+          <a:lnRef idx="1">
+            <a:schemeClr val="accent1"/>
+          </a:lnRef>
+          <a:fillRef idx="3">
+            <a:schemeClr val="accent1"/>
+          </a:fillRef>
+          <a:effectRef idx="2">
+            <a:schemeClr val="accent1"/>
+          </a:effectRef>
+          <a:fontRef idx="minor">
+            <a:schemeClr val="lt1"/>
+          </a:fontRef>
+        </p:style>
+        <p:txBody>
+          <a:bodyPr rtlCol="0" anchor="ctr"/>
+          <a:lstStyle/>
+          <a:p>
+            <a:pPr algn="ctr"/>
+          </a:p>
+        </p:txBody>
+      </p:sp>
+      <p:sp>
+        <p:nvSpPr>
+          <p:cNvPr id="3" name="Rectangle 2"/>
+          <p:cNvSpPr/>
+          <p:nvPr/>
+        </p:nvSpPr>
+        <p:spPr>
+          <a:xfrm>
+            <a:off x="0" y="0"/>
+            <a:ext cx="73152" cy="6858000"/>
+          </a:xfrm>
+          <a:prstGeom prst="rect">
+            <a:avLst/>
+          </a:prstGeom>
+          <a:solidFill>
+            <a:srgbClr val="B0893E"/>
+          </a:solidFill>
+          <a:ln>
+            <a:noFill/>
+          </a:ln>
+        </p:spPr>
+        <p:style>
+          <a:lnRef idx="1">
+            <a:schemeClr val="accent1"/>
+          </a:lnRef>
+          <a:fillRef idx="3">
+            <a:schemeClr val="accent1"/>
+          </a:fillRef>
+          <a:effectRef idx="2">
+            <a:schemeClr val="accent1"/>
+          </a:effectRef>
+          <a:fontRef idx="minor">
+            <a:schemeClr val="lt1"/>
+          </a:fontRef>
+        </p:style>
+        <p:txBody>
+          <a:bodyPr rtlCol="0" anchor="ctr"/>
+          <a:lstStyle/>
+          <a:p>
+            <a:pPr algn="ctr"/>
+          </a:p>
+        </p:txBody>
+      </p:sp>
+      <p:sp>
+        <p:nvSpPr>
+          <p:cNvPr id="4" name="TextBox 3"/>
+          <p:cNvSpPr txBox="1"/>
+          <p:nvPr/>
+        </p:nvSpPr>
+        <p:spPr>
+          <a:xfrm>
+            <a:off x="365760" y="164592"/>
+            <a:ext cx="8412480" cy="256032"/>
+          </a:xfrm>
+          <a:prstGeom prst="rect">
+            <a:avLst/>
+          </a:prstGeom>
+          <a:noFill/>
+        </p:spPr>
+        <p:txBody>
+          <a:bodyPr wrap="square">
+            <a:spAutoFit/>
+          </a:bodyPr>
+          <a:lstStyle/>
+          <a:p>
+            <a:pPr algn="l"/>
+            <a:r>
+              <a:rPr sz="1000" b="0">
+                <a:solidFill>
+                  <a:srgbClr val="B0893E"/>
+                </a:solidFill>
+                <a:latin typeface="Calibri"/>
+              </a:rPr>
+              <a:t>EVIDENCE ROOM — AP AGENT OS   ·   Minutes</a:t>
+            </a:r>
+          </a:p>
+        </p:txBody>
+      </p:sp>
+      <p:sp>
+        <p:nvSpPr>
+          <p:cNvPr id="5" name="TextBox 4"/>
+          <p:cNvSpPr txBox="1"/>
+          <p:nvPr/>
+        </p:nvSpPr>
+        <p:spPr>
+          <a:xfrm>
+            <a:off x="365760" y="502920"/>
+            <a:ext cx="8412480" cy="731520"/>
+          </a:xfrm>
+          <a:prstGeom prst="rect">
+            <a:avLst/>
+          </a:prstGeom>
+          <a:noFill/>
+        </p:spPr>
+        <p:txBody>
+          <a:bodyPr wrap="square">
+            <a:spAutoFit/>
+          </a:bodyPr>
+          <a:lstStyle/>
+          <a:p>
+            <a:pPr algn="l"/>
+            <a:r>
+              <a:rPr sz="2600" b="0">
+                <a:solidFill>
+                  <a:srgbClr val="12160F"/>
+                </a:solidFill>
+                <a:latin typeface="Georgia"/>
+              </a:rPr>
+              <a:t>What we write down</a:t>
+            </a:r>
+          </a:p>
+        </p:txBody>
+      </p:sp>
+      <p:sp>
+        <p:nvSpPr>
+          <p:cNvPr id="6" name="TextBox 5"/>
+          <p:cNvSpPr txBox="1"/>
+          <p:nvPr/>
+        </p:nvSpPr>
+        <p:spPr>
+          <a:xfrm>
+            <a:off x="365760" y="1371600"/>
+            <a:ext cx="8321040" cy="4937760"/>
+          </a:xfrm>
+          <a:prstGeom prst="rect">
+            <a:avLst/>
+          </a:prstGeom>
+          <a:noFill/>
+        </p:spPr>
+        <p:txBody>
+          <a:bodyPr wrap="square">
+            <a:spAutoFit/>
+          </a:bodyPr>
+          <a:lstStyle/>
+          <a:p>
+            <a:pPr>
+              <a:spcAft>
+                <a:spcPts val="800"/>
+              </a:spcAft>
+            </a:pPr>
+            <a:r>
+              <a:rPr sz="1600">
+                <a:solidFill>
+                  <a:srgbClr val="12160F"/>
+                </a:solidFill>
+                <a:latin typeface="Calibri"/>
+              </a:rPr>
+              <a:t>·  Decision per agent: promote / hold / demote / retire.</a:t>
+            </a:r>
+          </a:p>
+          <a:p>
+            <a:pPr>
+              <a:spcAft>
+                <a:spcPts val="800"/>
+              </a:spcAft>
+            </a:pPr>
+            <a:r>
+              <a:rPr sz="1600">
+                <a:solidFill>
+                  <a:srgbClr val="12160F"/>
+                </a:solidFill>
+                <a:latin typeface="Calibri"/>
+              </a:rPr>
+              <a:t>·  Evidence IDs reviewed.</a:t>
+            </a:r>
+          </a:p>
+          <a:p>
+            <a:pPr>
+              <a:spcAft>
+                <a:spcPts val="800"/>
+              </a:spcAft>
+            </a:pPr>
+            <a:r>
+              <a:rPr sz="1600">
+                <a:solidFill>
+                  <a:srgbClr val="12160F"/>
+                </a:solidFill>
+                <a:latin typeface="Calibri"/>
+              </a:rPr>
+              <a:t>·  Dissent, if any.</a:t>
+            </a:r>
+          </a:p>
+          <a:p>
+            <a:pPr>
+              <a:spcAft>
+                <a:spcPts val="800"/>
+              </a:spcAft>
+            </a:pPr>
+            <a:r>
+              <a:rPr sz="1600">
+                <a:solidFill>
+                  <a:srgbClr val="12160F"/>
+                </a:solidFill>
+                <a:latin typeface="Calibri"/>
+              </a:rPr>
+              <a:t>·  Next sample window.</a:t>
+            </a:r>
+          </a:p>
+          <a:p>
+            <a:pPr>
+              <a:spcAft>
+                <a:spcPts val="800"/>
+              </a:spcAft>
+            </a:pPr>
+            <a:r>
+              <a:rPr sz="1600">
+                <a:solidFill>
+                  <a:srgbClr val="12160F"/>
+                </a:solidFill>
+                <a:latin typeface="Calibri"/>
+              </a:rPr>
+              <a:t>·  Communications owner for operators and Audit.</a:t>
+            </a:r>
+          </a:p>
+        </p:txBody>
+      </p:sp>
+    </p:spTree>
+  </p:cSld>
+  <p:clrMapOvr>
+    <a:masterClrMapping/>
+  </p:clrMapOvr>
+</p:sld>
+</file>
+
+<file path=ppt/slides/slide8.xml><?xml version="1.0" encoding="utf-8"?>
+<p:sld xmlns:a="http://schemas.openxmlformats.org/drawingml/2006/main" xmlns:p="http://schemas.openxmlformats.org/presentationml/2006/main" xmlns:r="http://schemas.openxmlformats.org/officeDocument/2006/relationships">
+  <p:cSld>
+    <p:spTree>
+      <p:nvGrpSpPr>
+        <p:cNvPr id="1" name=""/>
+        <p:cNvGrpSpPr/>
+        <p:nvPr/>
+      </p:nvGrpSpPr>
+      <p:grpSpPr/>
+      <p:sp>
+        <p:nvSpPr>
+          <p:cNvPr id="2" name="Rectangle 1"/>
+          <p:cNvSpPr/>
+          <p:nvPr/>
+        </p:nvSpPr>
+        <p:spPr>
+          <a:xfrm>
+            <a:off x="0" y="0"/>
+            <a:ext cx="9144000" cy="6858000"/>
+          </a:xfrm>
+          <a:prstGeom prst="rect">
+            <a:avLst/>
+          </a:prstGeom>
+          <a:solidFill>
+            <a:srgbClr val="F3EEE4"/>
+          </a:solidFill>
+          <a:ln>
+            <a:noFill/>
+          </a:ln>
+        </p:spPr>
+        <p:style>
+          <a:lnRef idx="1">
+            <a:schemeClr val="accent1"/>
+          </a:lnRef>
+          <a:fillRef idx="3">
+            <a:schemeClr val="accent1"/>
+          </a:fillRef>
+          <a:effectRef idx="2">
+            <a:schemeClr val="accent1"/>
+          </a:effectRef>
+          <a:fontRef idx="minor">
+            <a:schemeClr val="lt1"/>
+          </a:fontRef>
+        </p:style>
+        <p:txBody>
+          <a:bodyPr rtlCol="0" anchor="ctr"/>
+          <a:lstStyle/>
+          <a:p>
+            <a:pPr algn="ctr"/>
+          </a:p>
+        </p:txBody>
+      </p:sp>
+      <p:sp>
+        <p:nvSpPr>
+          <p:cNvPr id="3" name="Rectangle 2"/>
+          <p:cNvSpPr/>
+          <p:nvPr/>
+        </p:nvSpPr>
+        <p:spPr>
+          <a:xfrm>
+            <a:off x="0" y="0"/>
+            <a:ext cx="73152" cy="6858000"/>
+          </a:xfrm>
+          <a:prstGeom prst="rect">
+            <a:avLst/>
+          </a:prstGeom>
+          <a:solidFill>
+            <a:srgbClr val="B0893E"/>
+          </a:solidFill>
+          <a:ln>
+            <a:noFill/>
+          </a:ln>
+        </p:spPr>
+        <p:style>
+          <a:lnRef idx="1">
+            <a:schemeClr val="accent1"/>
+          </a:lnRef>
+          <a:fillRef idx="3">
+            <a:schemeClr val="accent1"/>
+          </a:fillRef>
+          <a:effectRef idx="2">
+            <a:schemeClr val="accent1"/>
+          </a:effectRef>
+          <a:fontRef idx="minor">
+            <a:schemeClr val="lt1"/>
+          </a:fontRef>
+        </p:style>
+        <p:txBody>
+          <a:bodyPr rtlCol="0" anchor="ctr"/>
+          <a:lstStyle/>
+          <a:p>
+            <a:pPr algn="ctr"/>
+          </a:p>
+        </p:txBody>
+      </p:sp>
+      <p:sp>
+        <p:nvSpPr>
+          <p:cNvPr id="4" name="TextBox 3"/>
+          <p:cNvSpPr txBox="1"/>
+          <p:nvPr/>
+        </p:nvSpPr>
+        <p:spPr>
+          <a:xfrm>
+            <a:off x="365760" y="164592"/>
+            <a:ext cx="8412480" cy="256032"/>
+          </a:xfrm>
+          <a:prstGeom prst="rect">
+            <a:avLst/>
+          </a:prstGeom>
+          <a:noFill/>
+        </p:spPr>
+        <p:txBody>
+          <a:bodyPr wrap="square">
+            <a:spAutoFit/>
+          </a:bodyPr>
+          <a:lstStyle/>
+          <a:p>
+            <a:pPr algn="l"/>
+            <a:r>
+              <a:rPr sz="1000" b="0">
+                <a:solidFill>
+                  <a:srgbClr val="B0893E"/>
+                </a:solidFill>
+                <a:latin typeface="Calibri"/>
+              </a:rPr>
+              <a:t>EVIDENCE ROOM — AP AGENT OS   ·   Close</a:t>
+            </a:r>
+          </a:p>
+        </p:txBody>
+      </p:sp>
+      <p:sp>
+        <p:nvSpPr>
+          <p:cNvPr id="5" name="TextBox 4"/>
+          <p:cNvSpPr txBox="1"/>
+          <p:nvPr/>
+        </p:nvSpPr>
+        <p:spPr>
+          <a:xfrm>
+            <a:off x="365760" y="502920"/>
+            <a:ext cx="8412480" cy="731520"/>
+          </a:xfrm>
+          <a:prstGeom prst="rect">
+            <a:avLst/>
+          </a:prstGeom>
+          <a:noFill/>
+        </p:spPr>
+        <p:txBody>
+          <a:bodyPr wrap="square">
+            <a:spAutoFit/>
+          </a:bodyPr>
+          <a:lstStyle/>
+          <a:p>
+            <a:pPr algn="l"/>
+            <a:r>
+              <a:rPr sz="2600" b="0">
+                <a:solidFill>
+                  <a:srgbClr val="12160F"/>
+                </a:solidFill>
+                <a:latin typeface="Georgia"/>
+              </a:rPr>
+              <a:t>Language we will not use in the minutes</a:t>
+            </a:r>
+          </a:p>
+        </p:txBody>
+      </p:sp>
+      <p:sp>
+        <p:nvSpPr>
+          <p:cNvPr id="6" name="TextBox 5"/>
+          <p:cNvSpPr txBox="1"/>
+          <p:nvPr/>
+        </p:nvSpPr>
+        <p:spPr>
+          <a:xfrm>
+            <a:off x="365760" y="1371600"/>
+            <a:ext cx="8321040" cy="4937760"/>
+          </a:xfrm>
+          <a:prstGeom prst="rect">
+            <a:avLst/>
+          </a:prstGeom>
+          <a:noFill/>
+        </p:spPr>
+        <p:txBody>
+          <a:bodyPr wrap="square">
+            <a:spAutoFit/>
+          </a:bodyPr>
+          <a:lstStyle/>
+          <a:p>
+            <a:pPr>
+              <a:spcAft>
+                <a:spcPts val="800"/>
+              </a:spcAft>
+            </a:pPr>
+            <a:r>
+              <a:rPr sz="1600">
+                <a:solidFill>
+                  <a:srgbClr val="12160F"/>
+                </a:solidFill>
+                <a:latin typeface="Calibri"/>
+              </a:rPr>
+              <a:t>·  Guaranteed savings. Validated ROI. Touchless AP.</a:t>
+            </a:r>
+          </a:p>
+          <a:p>
+            <a:pPr>
+              <a:spcAft>
+                <a:spcPts val="800"/>
+              </a:spcAft>
+            </a:pPr>
+            <a:r>
+              <a:rPr sz="1600">
+                <a:solidFill>
+                  <a:srgbClr val="12160F"/>
+                </a:solidFill>
+                <a:latin typeface="Calibri"/>
+              </a:rPr>
+              <a:t>·  Fraud detection. Audit-ready. Compliant.</a:t>
+            </a:r>
+          </a:p>
+          <a:p>
+            <a:pPr>
+              <a:spcAft>
+                <a:spcPts val="800"/>
+              </a:spcAft>
+            </a:pPr>
+            <a:r>
+              <a:rPr sz="1600">
+                <a:solidFill>
+                  <a:srgbClr val="12160F"/>
+                </a:solidFill>
+                <a:latin typeface="Calibri"/>
+              </a:rPr>
+              <a:t>·  Autonomous payments. The agent paid.</a:t>
+            </a:r>
+          </a:p>
+          <a:p>
+            <a:pPr>
+              <a:spcAft>
+                <a:spcPts val="800"/>
+              </a:spcAft>
+            </a:pPr>
+            <a:r>
+              <a:rPr sz="1600">
+                <a:solidFill>
+                  <a:srgbClr val="12160F"/>
+                </a:solidFill>
+                <a:latin typeface="Calibri"/>
+              </a:rPr>
+              <a:t>·  Industry-average cost per invoice as our target.</a:t>
             </a:r>
           </a:p>
         </p:txBody>
